--- a/docs/quickguides/en/cars/pptx/12_Quick_Guide_oneSCM_Geschaeftskunden_Kampagnen_und_Sonderfaelle_EN_Cars.pptx
+++ b/docs/quickguides/en/cars/pptx/12_Quick_Guide_oneSCM_Geschaeftskunden_Kampagnen_und_Sonderfaelle_EN_Cars.pptx
@@ -1525,7 +1525,7 @@
                 <a:ea typeface="MB Corpo S Text Office" pitchFamily="34" charset="-122"/>
                 <a:cs typeface="MB Corpo S Text Office" pitchFamily="34" charset="-120"/>
               </a:rPr>
-              <a:t>This document is interactive – references to handbook chapters and systems are provided as links.</a:t>
+              <a:t>References to handbook chapters and systems are highlighted; e-mail addresses are provided as links.</a:t>
             </a:r>
             <a:endParaRPr lang="en-US" sz="900" dirty="0"/>
           </a:p>
@@ -1579,7 +1579,7 @@
         <p:spPr>
           <a:xfrm>
             <a:off x="201168" y="3118104"/>
-            <a:ext cx="2240280" cy="1335024"/>
+            <a:ext cx="2240280" cy="1362456"/>
           </a:xfrm>
           <a:prstGeom prst="rect">
             <a:avLst/>
@@ -1705,7 +1705,7 @@
         <p:spPr>
           <a:xfrm>
             <a:off x="2624328" y="3118104"/>
-            <a:ext cx="2240280" cy="1335024"/>
+            <a:ext cx="2240280" cy="1362456"/>
           </a:xfrm>
           <a:prstGeom prst="rect">
             <a:avLst/>
@@ -1732,7 +1732,7 @@
                 <a:ea typeface="MB Corpo S Text Office" pitchFamily="34" charset="-122"/>
                 <a:cs typeface="MB Corpo S Text Office" pitchFamily="34" charset="-120"/>
               </a:rPr>
-              <a:t>12.5 – 12.8 Processing</a:t>
+              <a:t>12.5 – 12.9 Processing</a:t>
             </a:r>
             <a:endParaRPr lang="en-US" sz="900" dirty="0"/>
           </a:p>
@@ -1817,6 +1817,27 @@
                 <a:cs typeface="MB Corpo S Text Office" pitchFamily="34" charset="-120"/>
               </a:rPr>
               <a:t>Customer Account Center</a:t>
+            </a:r>
+            <a:endParaRPr lang="en-US" sz="900" dirty="0"/>
+          </a:p>
+          <a:p>
+            <a:pPr marL="152400" indent="-152400">
+              <a:spcAft>
+                <a:spcPts val="100"/>
+              </a:spcAft>
+              <a:buSzPct val="100000"/>
+              <a:buChar char="•"/>
+            </a:pPr>
+            <a:r>
+              <a:rPr lang="en-US" sz="900" dirty="0">
+                <a:solidFill>
+                  <a:srgbClr val="262626"/>
+                </a:solidFill>
+                <a:latin typeface="MB Corpo S Text Office" pitchFamily="34" charset="0"/>
+                <a:ea typeface="MB Corpo S Text Office" pitchFamily="34" charset="-122"/>
+                <a:cs typeface="MB Corpo S Text Office" pitchFamily="34" charset="-120"/>
+              </a:rPr>
+              <a:t>Bulk creation and validation of vehicle lists</a:t>
             </a:r>
             <a:endParaRPr lang="en-US" sz="900" dirty="0"/>
           </a:p>
@@ -1838,7 +1859,7 @@
         </p:blipFill>
         <p:spPr>
           <a:xfrm>
-            <a:off x="201168" y="4562856"/>
+            <a:off x="201168" y="4590288"/>
             <a:ext cx="4663440" cy="1207008"/>
           </a:xfrm>
           <a:prstGeom prst="rect">
@@ -1918,7 +1939,7 @@
         <p:spPr>
           <a:xfrm>
             <a:off x="5065776" y="2606040"/>
-            <a:ext cx="4645152" cy="1024128"/>
+            <a:ext cx="4645152" cy="1344168"/>
           </a:xfrm>
           <a:prstGeom prst="rect">
             <a:avLst/>
@@ -2149,6 +2170,72 @@
             </a:r>
             <a:endParaRPr lang="en-US" sz="900" dirty="0"/>
           </a:p>
+          <a:p>
+            <a:pPr marL="203200" indent="-203200">
+              <a:spcAft>
+                <a:spcPts val="400"/>
+              </a:spcAft>
+              <a:buSzPct val="100000"/>
+              <a:buFont typeface="+mj-lt"/>
+              <a:buAutoNum type="arabicPeriod" startAt="4"/>
+            </a:pPr>
+            <a:r>
+              <a:rPr lang="en-US" sz="900" dirty="0">
+                <a:solidFill>
+                  <a:srgbClr val="262626"/>
+                </a:solidFill>
+                <a:latin typeface="MB Corpo S Text Office" pitchFamily="34" charset="0"/>
+                <a:ea typeface="MB Corpo S Text Office" pitchFamily="34" charset="-122"/>
+                <a:cs typeface="MB Corpo S Text Office" pitchFamily="34" charset="-120"/>
+              </a:rPr>
+              <a:t>The request is assigned to the responsible </a:t>
+            </a:r>
+            <a:r>
+              <a:rPr lang="en-US" sz="900" b="1" dirty="0">
+                <a:solidFill>
+                  <a:srgbClr val="262626"/>
+                </a:solidFill>
+                <a:latin typeface="MB Corpo S Text Office" pitchFamily="34" charset="0"/>
+                <a:ea typeface="MB Corpo S Text Office" pitchFamily="34" charset="-122"/>
+                <a:cs typeface="MB Corpo S Text Office" pitchFamily="34" charset="-120"/>
+              </a:rPr>
+              <a:t>Dealer</a:t>
+            </a:r>
+            <a:r>
+              <a:rPr lang="en-US" sz="900" dirty="0">
+                <a:solidFill>
+                  <a:srgbClr val="262626"/>
+                </a:solidFill>
+                <a:latin typeface="MB Corpo S Text Office" pitchFamily="34" charset="0"/>
+                <a:ea typeface="MB Corpo S Text Office" pitchFamily="34" charset="-122"/>
+                <a:cs typeface="MB Corpo S Text Office" pitchFamily="34" charset="-120"/>
+              </a:rPr>
+              <a:t> or processor (12.5) and </a:t>
+            </a:r>
+            <a:r>
+              <a:rPr lang="en-US" sz="900" b="1" dirty="0">
+                <a:solidFill>
+                  <a:srgbClr val="262626"/>
+                </a:solidFill>
+                <a:latin typeface="MB Corpo S Text Office" pitchFamily="34" charset="0"/>
+                <a:ea typeface="MB Corpo S Text Office" pitchFamily="34" charset="-122"/>
+                <a:cs typeface="MB Corpo S Text Office" pitchFamily="34" charset="-120"/>
+              </a:rPr>
+              <a:t>validated, approved or rejected</a:t>
+            </a:r>
+            <a:r>
+              <a:rPr lang="en-US" sz="900" dirty="0">
+                <a:solidFill>
+                  <a:srgbClr val="262626"/>
+                </a:solidFill>
+                <a:latin typeface="MB Corpo S Text Office" pitchFamily="34" charset="0"/>
+                <a:ea typeface="MB Corpo S Text Office" pitchFamily="34" charset="-122"/>
+                <a:cs typeface="MB Corpo S Text Office" pitchFamily="34" charset="-120"/>
+              </a:rPr>
+              <a:t> by MO or Market (12.6).</a:t>
+            </a:r>
+            <a:endParaRPr lang="en-US" sz="900" dirty="0"/>
+          </a:p>
         </p:txBody>
       </p:sp>
       <p:sp>
@@ -2159,7 +2246,7 @@
         </p:nvSpPr>
         <p:spPr>
           <a:xfrm>
-            <a:off x="5047488" y="3739896"/>
+            <a:off x="5047488" y="4059936"/>
             <a:ext cx="4663440" cy="475488"/>
           </a:xfrm>
           <a:prstGeom prst="roundRect">
@@ -2186,7 +2273,7 @@
         </p:nvSpPr>
         <p:spPr>
           <a:xfrm>
-            <a:off x="5120640" y="3739896"/>
+            <a:off x="5120640" y="4059936"/>
             <a:ext cx="274320" cy="475488"/>
           </a:xfrm>
           <a:prstGeom prst="rect">
@@ -2225,7 +2312,7 @@
         </p:nvSpPr>
         <p:spPr>
           <a:xfrm>
-            <a:off x="5458968" y="3739896"/>
+            <a:off x="5458968" y="4059936"/>
             <a:ext cx="4160520" cy="475488"/>
           </a:xfrm>
           <a:prstGeom prst="rect">
@@ -2275,8 +2362,8 @@
         </p:nvSpPr>
         <p:spPr>
           <a:xfrm>
-            <a:off x="5065776" y="4325112"/>
-            <a:ext cx="4645152" cy="886968"/>
+            <a:off x="5065776" y="4645152"/>
+            <a:ext cx="4645152" cy="1024128"/>
           </a:xfrm>
           <a:prstGeom prst="rect">
             <a:avLst/>
@@ -2294,72 +2381,6 @@
               </a:spcAft>
               <a:buSzPct val="100000"/>
               <a:buFont typeface="+mj-lt"/>
-              <a:buAutoNum type="arabicPeriod" startAt="4"/>
-            </a:pPr>
-            <a:r>
-              <a:rPr lang="en-US" sz="900" dirty="0">
-                <a:solidFill>
-                  <a:srgbClr val="262626"/>
-                </a:solidFill>
-                <a:latin typeface="MB Corpo S Text Office" pitchFamily="34" charset="0"/>
-                <a:ea typeface="MB Corpo S Text Office" pitchFamily="34" charset="-122"/>
-                <a:cs typeface="MB Corpo S Text Office" pitchFamily="34" charset="-120"/>
-              </a:rPr>
-              <a:t>The request is assigned to the responsible </a:t>
-            </a:r>
-            <a:r>
-              <a:rPr lang="en-US" sz="900" b="1" dirty="0">
-                <a:solidFill>
-                  <a:srgbClr val="262626"/>
-                </a:solidFill>
-                <a:latin typeface="MB Corpo S Text Office" pitchFamily="34" charset="0"/>
-                <a:ea typeface="MB Corpo S Text Office" pitchFamily="34" charset="-122"/>
-                <a:cs typeface="MB Corpo S Text Office" pitchFamily="34" charset="-120"/>
-              </a:rPr>
-              <a:t>Dealer</a:t>
-            </a:r>
-            <a:r>
-              <a:rPr lang="en-US" sz="900" dirty="0">
-                <a:solidFill>
-                  <a:srgbClr val="262626"/>
-                </a:solidFill>
-                <a:latin typeface="MB Corpo S Text Office" pitchFamily="34" charset="0"/>
-                <a:ea typeface="MB Corpo S Text Office" pitchFamily="34" charset="-122"/>
-                <a:cs typeface="MB Corpo S Text Office" pitchFamily="34" charset="-120"/>
-              </a:rPr>
-              <a:t> or processor (12.5) and </a:t>
-            </a:r>
-            <a:r>
-              <a:rPr lang="en-US" sz="900" b="1" dirty="0">
-                <a:solidFill>
-                  <a:srgbClr val="262626"/>
-                </a:solidFill>
-                <a:latin typeface="MB Corpo S Text Office" pitchFamily="34" charset="0"/>
-                <a:ea typeface="MB Corpo S Text Office" pitchFamily="34" charset="-122"/>
-                <a:cs typeface="MB Corpo S Text Office" pitchFamily="34" charset="-120"/>
-              </a:rPr>
-              <a:t>validated, approved or rejected</a:t>
-            </a:r>
-            <a:r>
-              <a:rPr lang="en-US" sz="900" dirty="0">
-                <a:solidFill>
-                  <a:srgbClr val="262626"/>
-                </a:solidFill>
-                <a:latin typeface="MB Corpo S Text Office" pitchFamily="34" charset="0"/>
-                <a:ea typeface="MB Corpo S Text Office" pitchFamily="34" charset="-122"/>
-                <a:cs typeface="MB Corpo S Text Office" pitchFamily="34" charset="-120"/>
-              </a:rPr>
-              <a:t> by MO or Market (12.6).</a:t>
-            </a:r>
-            <a:endParaRPr lang="en-US" sz="900" dirty="0"/>
-          </a:p>
-          <a:p>
-            <a:pPr marL="203200" indent="-203200">
-              <a:spcAft>
-                <a:spcPts val="400"/>
-              </a:spcAft>
-              <a:buSzPct val="100000"/>
-              <a:buFont typeface="+mj-lt"/>
               <a:buAutoNum type="arabicPeriod" startAt="5"/>
             </a:pPr>
             <a:r>
@@ -2460,6 +2481,50 @@
                 <a:cs typeface="MB Corpo S Text Office" pitchFamily="34" charset="-120"/>
               </a:rPr>
               <a:t> (12.8).</a:t>
+            </a:r>
+            <a:endParaRPr lang="en-US" sz="900" dirty="0"/>
+          </a:p>
+          <a:p>
+            <a:pPr marL="203200" indent="-203200">
+              <a:spcAft>
+                <a:spcPts val="400"/>
+              </a:spcAft>
+              <a:buSzPct val="100000"/>
+              <a:buFont typeface="+mj-lt"/>
+              <a:buAutoNum type="arabicPeriod" startAt="7"/>
+            </a:pPr>
+            <a:r>
+              <a:rPr lang="en-US" sz="900" dirty="0">
+                <a:solidFill>
+                  <a:srgbClr val="262626"/>
+                </a:solidFill>
+                <a:latin typeface="MB Corpo S Text Office" pitchFamily="34" charset="0"/>
+                <a:ea typeface="MB Corpo S Text Office" pitchFamily="34" charset="-122"/>
+                <a:cs typeface="MB Corpo S Text Office" pitchFamily="34" charset="-120"/>
+              </a:rPr>
+              <a:t>For fleets, hand vehicle lists to </a:t>
+            </a:r>
+            <a:r>
+              <a:rPr lang="en-US" sz="900" b="1" dirty="0">
+                <a:solidFill>
+                  <a:srgbClr val="262626"/>
+                </a:solidFill>
+                <a:latin typeface="MB Corpo S Text Office" pitchFamily="34" charset="0"/>
+                <a:ea typeface="MB Corpo S Text Office" pitchFamily="34" charset="-122"/>
+                <a:cs typeface="MB Corpo S Text Office" pitchFamily="34" charset="-120"/>
+              </a:rPr>
+              <a:t>bulk creation</a:t>
+            </a:r>
+            <a:r>
+              <a:rPr lang="en-US" sz="900" dirty="0">
+                <a:solidFill>
+                  <a:srgbClr val="262626"/>
+                </a:solidFill>
+                <a:latin typeface="MB Corpo S Text Office" pitchFamily="34" charset="0"/>
+                <a:ea typeface="MB Corpo S Text Office" pitchFamily="34" charset="-122"/>
+                <a:cs typeface="MB Corpo S Text Office" pitchFamily="34" charset="-120"/>
+              </a:rPr>
+              <a:t>; the system checks product, first registration and mileage per vehicle and notifies dealer, MO and MPC about the result table (12.9).</a:t>
             </a:r>
             <a:endParaRPr lang="en-US" sz="900" dirty="0"/>
           </a:p>
